--- a/dist/mundra-portal-walkthrough.pptx
+++ b/dist/mundra-portal-walkthrough.pptx
@@ -2052,48 +2052,33 @@
           <a:ln/>
         </p:spPr>
       </p:sp>
-      <p:sp>
-        <p:nvSpPr>
-          <p:cNvPr id="3" name="Text 1"/>
-          <p:cNvSpPr/>
-          <p:nvPr/>
-        </p:nvSpPr>
-        <p:spPr>
-          <a:xfrm>
-            <a:off x="868680" y="1371600"/>
-            <a:ext cx="7315200" cy="365760"/>
+      <p:pic>
+        <p:nvPicPr>
+          <p:cNvPr id="3" name="Image 0" descr="/home/user/maritime-project-presentation/build/assets/adani-white.png">    </p:cNvPr>
+          <p:cNvPicPr>
+            <a:picLocks noChangeAspect="1"/>
+          </p:cNvPicPr>
+          <p:nvPr/>
+        </p:nvPicPr>
+        <p:blipFill>
+          <a:blip r:embed="rId1"/>
+          <a:stretch>
+            <a:fillRect/>
+          </a:stretch>
+        </p:blipFill>
+        <p:spPr>
+          <a:xfrm>
+            <a:off x="9814255" y="548640"/>
+            <a:ext cx="1728216" cy="548640"/>
           </a:xfrm>
           <a:prstGeom prst="rect">
             <a:avLst/>
           </a:prstGeom>
-          <a:noFill/>
-          <a:ln/>
-        </p:spPr>
-        <p:txBody>
-          <a:bodyPr wrap="square" lIns="0" tIns="0" rIns="0" bIns="0" rtlCol="0" anchor="ctr"/>
-          <a:lstStyle/>
-          <a:p>
-            <a:pPr indent="0" marL="0">
-              <a:buNone/>
-            </a:pPr>
-            <a:r>
-              <a:rPr lang="en-US" sz="1300" b="1" spc="400" kern="0" dirty="0">
-                <a:solidFill>
-                  <a:srgbClr val="7FC7CC"/>
-                </a:solidFill>
-                <a:latin typeface="Calibri" pitchFamily="34" charset="0"/>
-                <a:ea typeface="Calibri" pitchFamily="34" charset="-122"/>
-                <a:cs typeface="Calibri" pitchFamily="34" charset="-120"/>
-              </a:rPr>
-              <a:t>MOBILISE APP LAB</a:t>
-            </a:r>
-            <a:endParaRPr lang="en-US" sz="1300" dirty="0"/>
-          </a:p>
-        </p:txBody>
-      </p:sp>
-      <p:sp>
-        <p:nvSpPr>
-          <p:cNvPr id="4" name="Text 2"/>
+        </p:spPr>
+      </p:pic>
+      <p:sp>
+        <p:nvSpPr>
+          <p:cNvPr id="4" name="Text 1"/>
           <p:cNvSpPr/>
           <p:nvPr/>
         </p:nvSpPr>
@@ -2155,7 +2140,7 @@
       </p:sp>
       <p:sp>
         <p:nvSpPr>
-          <p:cNvPr id="5" name="Text 3"/>
+          <p:cNvPr id="5" name="Text 2"/>
           <p:cNvSpPr/>
           <p:nvPr/>
         </p:nvSpPr>
@@ -2194,7 +2179,7 @@
       </p:sp>
       <p:sp>
         <p:nvSpPr>
-          <p:cNvPr id="6" name="Text 4"/>
+          <p:cNvPr id="6" name="Text 3"/>
           <p:cNvSpPr/>
           <p:nvPr/>
         </p:nvSpPr>
@@ -2228,6 +2213,98 @@
               <a:t>August 2026</a:t>
             </a:r>
             <a:endParaRPr lang="en-US" sz="1300" dirty="0"/>
+          </a:p>
+        </p:txBody>
+      </p:sp>
+      <p:pic>
+        <p:nvPicPr>
+          <p:cNvPr id="7" name="Image 1" descr="/home/user/maritime-project-presentation/build/assets/mobilise-badge-white.png">    </p:cNvPr>
+          <p:cNvPicPr>
+            <a:picLocks noChangeAspect="1"/>
+          </p:cNvPicPr>
+          <p:nvPr/>
+        </p:nvPicPr>
+        <p:blipFill>
+          <a:blip r:embed="rId2"/>
+          <a:stretch>
+            <a:fillRect/>
+          </a:stretch>
+        </p:blipFill>
+        <p:spPr>
+          <a:xfrm>
+            <a:off x="868680" y="5852160"/>
+            <a:ext cx="384048" cy="384048"/>
+          </a:xfrm>
+          <a:prstGeom prst="rect">
+            <a:avLst/>
+          </a:prstGeom>
+        </p:spPr>
+      </p:pic>
+      <p:sp>
+        <p:nvSpPr>
+          <p:cNvPr id="8" name="Text 4"/>
+          <p:cNvSpPr/>
+          <p:nvPr/>
+        </p:nvSpPr>
+        <p:spPr>
+          <a:xfrm>
+            <a:off x="1371600" y="5806440"/>
+            <a:ext cx="5486400" cy="502920"/>
+          </a:xfrm>
+          <a:prstGeom prst="rect">
+            <a:avLst/>
+          </a:prstGeom>
+          <a:noFill/>
+          <a:ln/>
+        </p:spPr>
+        <p:txBody>
+          <a:bodyPr wrap="square" lIns="0" tIns="0" rIns="0" bIns="0" rtlCol="0" anchor="ctr"/>
+          <a:lstStyle/>
+          <a:p>
+            <a:pPr indent="0" marL="0">
+              <a:buNone/>
+            </a:pPr>
+            <a:r>
+              <a:rPr lang="en-US" sz="850" spc="200" kern="0" dirty="0">
+                <a:solidFill>
+                  <a:srgbClr val="7A93A0"/>
+                </a:solidFill>
+                <a:latin typeface="Calibri" pitchFamily="34" charset="0"/>
+                <a:ea typeface="Calibri" pitchFamily="34" charset="-122"/>
+                <a:cs typeface="Calibri" pitchFamily="34" charset="-120"/>
+              </a:rPr>
+              <a:t>POWERED BY
+</a:t>
+            </a:r>
+            <a:pPr indent="0" marL="0">
+              <a:buNone/>
+            </a:pPr>
+            <a:r>
+              <a:rPr lang="en-US" sz="1300" b="1" dirty="0">
+                <a:solidFill>
+                  <a:srgbClr val="FFFFFF"/>
+                </a:solidFill>
+                <a:latin typeface="Calibri" pitchFamily="34" charset="0"/>
+                <a:ea typeface="Calibri" pitchFamily="34" charset="-122"/>
+                <a:cs typeface="Calibri" pitchFamily="34" charset="-120"/>
+              </a:rPr>
+              <a:t>Mobilise App Lab</a:t>
+            </a:r>
+            <a:pPr indent="0" marL="0">
+              <a:buNone/>
+            </a:pPr>
+            <a:r>
+              <a:rPr lang="en-US" sz="1000" dirty="0">
+                <a:solidFill>
+                  <a:srgbClr val="7FC7CC"/>
+                </a:solidFill>
+                <a:latin typeface="Calibri" pitchFamily="34" charset="0"/>
+                <a:ea typeface="Calibri" pitchFamily="34" charset="-122"/>
+                <a:cs typeface="Calibri" pitchFamily="34" charset="-120"/>
+              </a:rPr>
+              <a:t>  ·  mobilise.co.in</a:t>
+            </a:r>
+            <a:endParaRPr lang="en-US" sz="850" dirty="0"/>
           </a:p>
         </p:txBody>
       </p:sp>
@@ -2940,9 +3017,33 @@
           <a:chExt cx="0" cy="0"/>
         </a:xfrm>
       </p:grpSpPr>
-      <p:sp>
-        <p:nvSpPr>
-          <p:cNvPr id="2" name="Text 0"/>
+      <p:pic>
+        <p:nvPicPr>
+          <p:cNvPr id="2" name="Image 0" descr="/home/user/maritime-project-presentation/build/assets/adani-white.png">    </p:cNvPr>
+          <p:cNvPicPr>
+            <a:picLocks noChangeAspect="1"/>
+          </p:cNvPicPr>
+          <p:nvPr/>
+        </p:nvPicPr>
+        <p:blipFill>
+          <a:blip r:embed="rId1"/>
+          <a:stretch>
+            <a:fillRect/>
+          </a:stretch>
+        </p:blipFill>
+        <p:spPr>
+          <a:xfrm>
+            <a:off x="9814255" y="548640"/>
+            <a:ext cx="1728216" cy="548640"/>
+          </a:xfrm>
+          <a:prstGeom prst="rect">
+            <a:avLst/>
+          </a:prstGeom>
+        </p:spPr>
+      </p:pic>
+      <p:sp>
+        <p:nvSpPr>
+          <p:cNvPr id="3" name="Text 0"/>
           <p:cNvSpPr/>
           <p:nvPr/>
         </p:nvSpPr>
@@ -2981,7 +3082,7 @@
       </p:sp>
       <p:sp>
         <p:nvSpPr>
-          <p:cNvPr id="3" name="Text 1"/>
+          <p:cNvPr id="4" name="Text 1"/>
           <p:cNvSpPr/>
           <p:nvPr/>
         </p:nvSpPr>
@@ -3020,7 +3121,7 @@
       </p:sp>
       <p:sp>
         <p:nvSpPr>
-          <p:cNvPr id="4" name="Text 2"/>
+          <p:cNvPr id="5" name="Text 2"/>
           <p:cNvSpPr/>
           <p:nvPr/>
         </p:nvSpPr>
@@ -3059,7 +3160,7 @@
       </p:sp>
       <p:sp>
         <p:nvSpPr>
-          <p:cNvPr id="5" name="Shape 3"/>
+          <p:cNvPr id="6" name="Shape 3"/>
           <p:cNvSpPr/>
           <p:nvPr/>
         </p:nvSpPr>
@@ -3077,16 +3178,40 @@
           <a:ln/>
         </p:spPr>
       </p:sp>
-      <p:sp>
-        <p:nvSpPr>
-          <p:cNvPr id="6" name="Text 4"/>
+      <p:pic>
+        <p:nvPicPr>
+          <p:cNvPr id="7" name="Image 1" descr="/home/user/maritime-project-presentation/build/assets/mobilise-badge-white.png">    </p:cNvPr>
+          <p:cNvPicPr>
+            <a:picLocks noChangeAspect="1"/>
+          </p:cNvPicPr>
+          <p:nvPr/>
+        </p:nvPicPr>
+        <p:blipFill>
+          <a:blip r:embed="rId2"/>
+          <a:stretch>
+            <a:fillRect/>
+          </a:stretch>
+        </p:blipFill>
+        <p:spPr>
+          <a:xfrm>
+            <a:off x="868680" y="4389120"/>
+            <a:ext cx="384048" cy="384048"/>
+          </a:xfrm>
+          <a:prstGeom prst="rect">
+            <a:avLst/>
+          </a:prstGeom>
+        </p:spPr>
+      </p:pic>
+      <p:sp>
+        <p:nvSpPr>
+          <p:cNvPr id="8" name="Text 4"/>
           <p:cNvSpPr/>
           <p:nvPr/>
         </p:nvSpPr>
         <p:spPr>
           <a:xfrm>
-            <a:off x="868680" y="4343400"/>
-            <a:ext cx="7315200" cy="411480"/>
+            <a:off x="1371600" y="4343400"/>
+            <a:ext cx="5486400" cy="502920"/>
           </a:xfrm>
           <a:prstGeom prst="rect">
             <a:avLst/>
@@ -3102,7 +3227,22 @@
               <a:buNone/>
             </a:pPr>
             <a:r>
-              <a:rPr lang="en-US" sz="1500" b="1" dirty="0">
+              <a:rPr lang="en-US" sz="850" spc="200" kern="0" dirty="0">
+                <a:solidFill>
+                  <a:srgbClr val="7A93A0"/>
+                </a:solidFill>
+                <a:latin typeface="Calibri" pitchFamily="34" charset="0"/>
+                <a:ea typeface="Calibri" pitchFamily="34" charset="-122"/>
+                <a:cs typeface="Calibri" pitchFamily="34" charset="-120"/>
+              </a:rPr>
+              <a:t>POWERED BY
+</a:t>
+            </a:r>
+            <a:pPr indent="0" marL="0">
+              <a:buNone/>
+            </a:pPr>
+            <a:r>
+              <a:rPr lang="en-US" sz="1300" b="1" dirty="0">
                 <a:solidFill>
                   <a:srgbClr val="FFFFFF"/>
                 </a:solidFill>
@@ -3112,7 +3252,21 @@
               </a:rPr>
               <a:t>Mobilise App Lab</a:t>
             </a:r>
-            <a:endParaRPr lang="en-US" sz="1500" dirty="0"/>
+            <a:pPr indent="0" marL="0">
+              <a:buNone/>
+            </a:pPr>
+            <a:r>
+              <a:rPr lang="en-US" sz="1000" dirty="0">
+                <a:solidFill>
+                  <a:srgbClr val="7FC7CC"/>
+                </a:solidFill>
+                <a:latin typeface="Calibri" pitchFamily="34" charset="0"/>
+                <a:ea typeface="Calibri" pitchFamily="34" charset="-122"/>
+                <a:cs typeface="Calibri" pitchFamily="34" charset="-120"/>
+              </a:rPr>
+              <a:t>  ·  mobilise.co.in</a:t>
+            </a:r>
+            <a:endParaRPr lang="en-US" sz="850" dirty="0"/>
           </a:p>
         </p:txBody>
       </p:sp>

--- a/dist/mundra-portal-walkthrough.pptx
+++ b/dist/mundra-portal-walkthrough.pptx
@@ -2391,8 +2391,8 @@
         </p:nvSpPr>
         <p:spPr>
           <a:xfrm>
-            <a:off x="1261872" y="329184"/>
-            <a:ext cx="10426903" cy="676656"/>
+            <a:off x="1261872" y="274320"/>
+            <a:ext cx="10426903" cy="804672"/>
           </a:xfrm>
           <a:prstGeom prst="rect">
             <a:avLst/>
@@ -2408,7 +2408,7 @@
               <a:buNone/>
             </a:pPr>
             <a:r>
-              <a:rPr lang="en-US" sz="2100" b="1" dirty="0">
+              <a:rPr lang="en-US" sz="2300" b="1" dirty="0">
                 <a:solidFill>
                   <a:srgbClr val="15242E"/>
                 </a:solidFill>
@@ -2418,7 +2418,7 @@
               </a:rPr>
               <a:t>Crew and certificates tracked — warnings before anything expires.</a:t>
             </a:r>
-            <a:endParaRPr lang="en-US" sz="2100" dirty="0"/>
+            <a:endParaRPr lang="en-US" sz="2300" dirty="0"/>
           </a:p>
         </p:txBody>
       </p:sp>
@@ -2430,7 +2430,7 @@
         </p:nvSpPr>
         <p:spPr>
           <a:xfrm>
-            <a:off x="1280160" y="987552"/>
+            <a:off x="1280160" y="1097280"/>
             <a:ext cx="2011680" cy="41148"/>
           </a:xfrm>
           <a:prstGeom prst="rect">
@@ -2458,8 +2458,8 @@
         </p:blipFill>
         <p:spPr>
           <a:xfrm>
-            <a:off x="1706728" y="1143000"/>
-            <a:ext cx="8778240" cy="5486400"/>
+            <a:off x="1779880" y="1261872"/>
+            <a:ext cx="8631936" cy="5394960"/>
           </a:xfrm>
           <a:prstGeom prst="ellipse">
             <a:avLst/>
@@ -2556,8 +2556,8 @@
         </p:nvSpPr>
         <p:spPr>
           <a:xfrm>
-            <a:off x="1261872" y="329184"/>
-            <a:ext cx="10426903" cy="676656"/>
+            <a:off x="1261872" y="274320"/>
+            <a:ext cx="10426903" cy="804672"/>
           </a:xfrm>
           <a:prstGeom prst="rect">
             <a:avLst/>
@@ -2573,7 +2573,7 @@
               <a:buNone/>
             </a:pPr>
             <a:r>
-              <a:rPr lang="en-US" sz="2100" b="1" dirty="0">
+              <a:rPr lang="en-US" sz="2300" b="1" dirty="0">
                 <a:solidFill>
                   <a:srgbClr val="15242E"/>
                 </a:solidFill>
@@ -2583,7 +2583,7 @@
               </a:rPr>
               <a:t>Ask in plain words — it answers from your port’s own records.</a:t>
             </a:r>
-            <a:endParaRPr lang="en-US" sz="2100" dirty="0"/>
+            <a:endParaRPr lang="en-US" sz="2300" dirty="0"/>
           </a:p>
         </p:txBody>
       </p:sp>
@@ -2595,7 +2595,7 @@
         </p:nvSpPr>
         <p:spPr>
           <a:xfrm>
-            <a:off x="1280160" y="987552"/>
+            <a:off x="1280160" y="1097280"/>
             <a:ext cx="2011680" cy="41148"/>
           </a:xfrm>
           <a:prstGeom prst="rect">
@@ -2623,8 +2623,8 @@
         </p:blipFill>
         <p:spPr>
           <a:xfrm>
-            <a:off x="1706728" y="1143000"/>
-            <a:ext cx="8778240" cy="5486400"/>
+            <a:off x="1779880" y="1261872"/>
+            <a:ext cx="8631936" cy="5394960"/>
           </a:xfrm>
           <a:prstGeom prst="ellipse">
             <a:avLst/>
@@ -2721,8 +2721,8 @@
         </p:nvSpPr>
         <p:spPr>
           <a:xfrm>
-            <a:off x="1261872" y="329184"/>
-            <a:ext cx="10426903" cy="676656"/>
+            <a:off x="1261872" y="274320"/>
+            <a:ext cx="10426903" cy="804672"/>
           </a:xfrm>
           <a:prstGeom prst="rect">
             <a:avLst/>
@@ -2738,7 +2738,7 @@
               <a:buNone/>
             </a:pPr>
             <a:r>
-              <a:rPr lang="en-US" sz="2100" b="1" dirty="0">
+              <a:rPr lang="en-US" sz="2300" b="1" dirty="0">
                 <a:solidFill>
                   <a:srgbClr val="15242E"/>
                 </a:solidFill>
@@ -2748,7 +2748,7 @@
               </a:rPr>
               <a:t>Your team controls everything — masters, settings, users.</a:t>
             </a:r>
-            <a:endParaRPr lang="en-US" sz="2100" dirty="0"/>
+            <a:endParaRPr lang="en-US" sz="2300" dirty="0"/>
           </a:p>
         </p:txBody>
       </p:sp>
@@ -2760,7 +2760,7 @@
         </p:nvSpPr>
         <p:spPr>
           <a:xfrm>
-            <a:off x="1280160" y="987552"/>
+            <a:off x="1280160" y="1097280"/>
             <a:ext cx="2011680" cy="41148"/>
           </a:xfrm>
           <a:prstGeom prst="rect">
@@ -2788,8 +2788,8 @@
         </p:blipFill>
         <p:spPr>
           <a:xfrm>
-            <a:off x="1706728" y="1143000"/>
-            <a:ext cx="8778240" cy="5486400"/>
+            <a:off x="1779880" y="1261872"/>
+            <a:ext cx="8631936" cy="5394960"/>
           </a:xfrm>
           <a:prstGeom prst="ellipse">
             <a:avLst/>
@@ -2860,7 +2860,7 @@
               <a:buNone/>
             </a:pPr>
             <a:r>
-              <a:rPr lang="en-US" sz="3400" b="1" dirty="0">
+              <a:rPr lang="en-US" sz="3800" b="1" dirty="0">
                 <a:solidFill>
                   <a:srgbClr val="15242E"/>
                 </a:solidFill>
@@ -2870,7 +2870,7 @@
               </a:rPr>
               <a:t>Why this matters</a:t>
             </a:r>
-            <a:endParaRPr lang="en-US" sz="3400" dirty="0"/>
+            <a:endParaRPr lang="en-US" sz="3800" dirty="0"/>
           </a:p>
         </p:txBody>
       </p:sp>
@@ -2926,7 +2926,7 @@
               <a:buChar char="•"/>
             </a:pPr>
             <a:r>
-              <a:rPr lang="en-US" sz="2000" dirty="0">
+              <a:rPr lang="en-US" sz="2200" dirty="0">
                 <a:solidFill>
                   <a:srgbClr val="2E4450"/>
                 </a:solidFill>
@@ -2936,7 +2936,7 @@
               </a:rPr>
               <a:t>It is working software, not a proposal — you can click it today.</a:t>
             </a:r>
-            <a:endParaRPr lang="en-US" sz="2000" dirty="0"/>
+            <a:endParaRPr lang="en-US" sz="2200" dirty="0"/>
           </a:p>
           <a:p>
             <a:pPr marL="279400" indent="-279400">
@@ -2950,7 +2950,7 @@
               <a:buChar char="•"/>
             </a:pPr>
             <a:r>
-              <a:rPr lang="en-US" sz="2000" dirty="0">
+              <a:rPr lang="en-US" sz="2200" dirty="0">
                 <a:solidFill>
                   <a:srgbClr val="2E4450"/>
                 </a:solidFill>
@@ -2960,7 +2960,7 @@
               </a:rPr>
               <a:t>It is built the way a port actually runs — berths, tides, vessel calls, GST invoices, inspections.</a:t>
             </a:r>
-            <a:endParaRPr lang="en-US" sz="2000" dirty="0"/>
+            <a:endParaRPr lang="en-US" sz="2200" dirty="0"/>
           </a:p>
           <a:p>
             <a:pPr marL="279400" indent="-279400">
@@ -2971,7 +2971,7 @@
               <a:buChar char="•"/>
             </a:pPr>
             <a:r>
-              <a:rPr lang="en-US" sz="2000" dirty="0">
+              <a:rPr lang="en-US" sz="2200" dirty="0">
                 <a:solidFill>
                   <a:srgbClr val="2E4450"/>
                 </a:solidFill>
@@ -2981,7 +2981,7 @@
               </a:rPr>
               <a:t>It can be shaped with your team into a pilot for the areas you choose.</a:t>
             </a:r>
-            <a:endParaRPr lang="en-US" sz="2000" dirty="0"/>
+            <a:endParaRPr lang="en-US" sz="2200" dirty="0"/>
           </a:p>
         </p:txBody>
       </p:sp>
@@ -3327,7 +3327,7 @@
               <a:buNone/>
             </a:pPr>
             <a:r>
-              <a:rPr lang="en-US" sz="3400" b="1" dirty="0">
+              <a:rPr lang="en-US" sz="3800" b="1" dirty="0">
                 <a:solidFill>
                   <a:srgbClr val="15242E"/>
                 </a:solidFill>
@@ -3337,7 +3337,7 @@
               </a:rPr>
               <a:t>What is this?</a:t>
             </a:r>
-            <a:endParaRPr lang="en-US" sz="3400" dirty="0"/>
+            <a:endParaRPr lang="en-US" sz="3800" dirty="0"/>
           </a:p>
         </p:txBody>
       </p:sp>
@@ -3393,7 +3393,7 @@
               <a:buChar char="•"/>
             </a:pPr>
             <a:r>
-              <a:rPr lang="en-US" sz="2000" dirty="0">
+              <a:rPr lang="en-US" sz="2200" dirty="0">
                 <a:solidFill>
                   <a:srgbClr val="2E4450"/>
                 </a:solidFill>
@@ -3403,7 +3403,7 @@
               </a:rPr>
               <a:t>One software where the whole port works — every department, one login.</a:t>
             </a:r>
-            <a:endParaRPr lang="en-US" sz="2000" dirty="0"/>
+            <a:endParaRPr lang="en-US" sz="2200" dirty="0"/>
           </a:p>
           <a:p>
             <a:pPr marL="279400" indent="-279400">
@@ -3417,7 +3417,7 @@
               <a:buChar char="•"/>
             </a:pPr>
             <a:r>
-              <a:rPr lang="en-US" sz="2000" dirty="0">
+              <a:rPr lang="en-US" sz="2200" dirty="0">
                 <a:solidFill>
                   <a:srgbClr val="2E4450"/>
                 </a:solidFill>
@@ -3427,7 +3427,7 @@
               </a:rPr>
               <a:t>It covers daily harbour operations, vessels, crew, incidents, inspections, port companies, billing and reports.</a:t>
             </a:r>
-            <a:endParaRPr lang="en-US" sz="2000" dirty="0"/>
+            <a:endParaRPr lang="en-US" sz="2200" dirty="0"/>
           </a:p>
           <a:p>
             <a:pPr marL="279400" indent="-279400">
@@ -3438,7 +3438,7 @@
               <a:buChar char="•"/>
             </a:pPr>
             <a:r>
-              <a:rPr lang="en-US" sz="2000" dirty="0">
+              <a:rPr lang="en-US" sz="2200" dirty="0">
                 <a:solidFill>
                   <a:srgbClr val="2E4450"/>
                 </a:solidFill>
@@ -3448,7 +3448,7 @@
               </a:rPr>
               <a:t>It is already built and running. This deck is just pictures of it.</a:t>
             </a:r>
-            <a:endParaRPr lang="en-US" sz="2000" dirty="0"/>
+            <a:endParaRPr lang="en-US" sz="2200" dirty="0"/>
           </a:p>
         </p:txBody>
       </p:sp>
@@ -3535,8 +3535,8 @@
         </p:nvSpPr>
         <p:spPr>
           <a:xfrm>
-            <a:off x="1261872" y="329184"/>
-            <a:ext cx="10426903" cy="676656"/>
+            <a:off x="1261872" y="274320"/>
+            <a:ext cx="10426903" cy="804672"/>
           </a:xfrm>
           <a:prstGeom prst="rect">
             <a:avLst/>
@@ -3552,7 +3552,7 @@
               <a:buNone/>
             </a:pPr>
             <a:r>
-              <a:rPr lang="en-US" sz="2100" b="1" dirty="0">
+              <a:rPr lang="en-US" sz="2300" b="1" dirty="0">
                 <a:solidFill>
                   <a:srgbClr val="15242E"/>
                 </a:solidFill>
@@ -3562,7 +3562,7 @@
               </a:rPr>
               <a:t>Sign in once — each person sees only the applications their role needs.</a:t>
             </a:r>
-            <a:endParaRPr lang="en-US" sz="2100" dirty="0"/>
+            <a:endParaRPr lang="en-US" sz="2300" dirty="0"/>
           </a:p>
         </p:txBody>
       </p:sp>
@@ -3574,7 +3574,7 @@
         </p:nvSpPr>
         <p:spPr>
           <a:xfrm>
-            <a:off x="1280160" y="987552"/>
+            <a:off x="1280160" y="1097280"/>
             <a:ext cx="2011680" cy="41148"/>
           </a:xfrm>
           <a:prstGeom prst="rect">
@@ -3602,8 +3602,8 @@
         </p:blipFill>
         <p:spPr>
           <a:xfrm>
-            <a:off x="1706728" y="1143000"/>
-            <a:ext cx="8778240" cy="5486400"/>
+            <a:off x="1779880" y="1261872"/>
+            <a:ext cx="8631936" cy="5394960"/>
           </a:xfrm>
           <a:prstGeom prst="ellipse">
             <a:avLst/>
@@ -3700,8 +3700,8 @@
         </p:nvSpPr>
         <p:spPr>
           <a:xfrm>
-            <a:off x="1261872" y="329184"/>
-            <a:ext cx="10426903" cy="676656"/>
+            <a:off x="1261872" y="274320"/>
+            <a:ext cx="10426903" cy="804672"/>
           </a:xfrm>
           <a:prstGeom prst="rect">
             <a:avLst/>
@@ -3717,7 +3717,7 @@
               <a:buNone/>
             </a:pPr>
             <a:r>
-              <a:rPr lang="en-US" sz="2100" b="1" dirty="0">
+              <a:rPr lang="en-US" sz="2300" b="1" dirty="0">
                 <a:solidFill>
                   <a:srgbClr val="15242E"/>
                 </a:solidFill>
@@ -3727,7 +3727,7 @@
               </a:rPr>
               <a:t>The whole port on one screen, the moment you sign in.</a:t>
             </a:r>
-            <a:endParaRPr lang="en-US" sz="2100" dirty="0"/>
+            <a:endParaRPr lang="en-US" sz="2300" dirty="0"/>
           </a:p>
         </p:txBody>
       </p:sp>
@@ -3739,7 +3739,7 @@
         </p:nvSpPr>
         <p:spPr>
           <a:xfrm>
-            <a:off x="1280160" y="987552"/>
+            <a:off x="1280160" y="1097280"/>
             <a:ext cx="2011680" cy="41148"/>
           </a:xfrm>
           <a:prstGeom prst="rect">
@@ -3767,8 +3767,8 @@
         </p:blipFill>
         <p:spPr>
           <a:xfrm>
-            <a:off x="1706728" y="1143000"/>
-            <a:ext cx="8778240" cy="5486400"/>
+            <a:off x="1779880" y="1261872"/>
+            <a:ext cx="8631936" cy="5394960"/>
           </a:xfrm>
           <a:prstGeom prst="ellipse">
             <a:avLst/>
@@ -3865,8 +3865,8 @@
         </p:nvSpPr>
         <p:spPr>
           <a:xfrm>
-            <a:off x="1261872" y="329184"/>
-            <a:ext cx="10426903" cy="676656"/>
+            <a:off x="1261872" y="274320"/>
+            <a:ext cx="10426903" cy="804672"/>
           </a:xfrm>
           <a:prstGeom prst="rect">
             <a:avLst/>
@@ -3882,7 +3882,7 @@
               <a:buNone/>
             </a:pPr>
             <a:r>
-              <a:rPr lang="en-US" sz="2100" b="1" dirty="0">
+              <a:rPr lang="en-US" sz="2300" b="1" dirty="0">
                 <a:solidFill>
                   <a:srgbClr val="15242E"/>
                 </a:solidFill>
@@ -3892,7 +3892,7 @@
               </a:rPr>
               <a:t>Every berth and every vessel — who is where, right now.</a:t>
             </a:r>
-            <a:endParaRPr lang="en-US" sz="2100" dirty="0"/>
+            <a:endParaRPr lang="en-US" sz="2300" dirty="0"/>
           </a:p>
         </p:txBody>
       </p:sp>
@@ -3904,7 +3904,7 @@
         </p:nvSpPr>
         <p:spPr>
           <a:xfrm>
-            <a:off x="1280160" y="987552"/>
+            <a:off x="1280160" y="1097280"/>
             <a:ext cx="2011680" cy="41148"/>
           </a:xfrm>
           <a:prstGeom prst="rect">
@@ -3932,8 +3932,8 @@
         </p:blipFill>
         <p:spPr>
           <a:xfrm>
-            <a:off x="1706728" y="1143000"/>
-            <a:ext cx="8778240" cy="5486400"/>
+            <a:off x="1779880" y="1261872"/>
+            <a:ext cx="8631936" cy="5394960"/>
           </a:xfrm>
           <a:prstGeom prst="ellipse">
             <a:avLst/>
@@ -4030,8 +4030,8 @@
         </p:nvSpPr>
         <p:spPr>
           <a:xfrm>
-            <a:off x="1261872" y="329184"/>
-            <a:ext cx="10426903" cy="676656"/>
+            <a:off x="1261872" y="274320"/>
+            <a:ext cx="10426903" cy="804672"/>
           </a:xfrm>
           <a:prstGeom prst="rect">
             <a:avLst/>
@@ -4047,7 +4047,7 @@
               <a:buNone/>
             </a:pPr>
             <a:r>
-              <a:rPr lang="en-US" sz="2100" b="1" dirty="0">
+              <a:rPr lang="en-US" sz="2300" b="1" dirty="0">
                 <a:solidFill>
                   <a:srgbClr val="15242E"/>
                 </a:solidFill>
@@ -4057,7 +4057,7 @@
               </a:rPr>
               <a:t>The daily berthing report you already publish — generated automatically.</a:t>
             </a:r>
-            <a:endParaRPr lang="en-US" sz="2100" dirty="0"/>
+            <a:endParaRPr lang="en-US" sz="2300" dirty="0"/>
           </a:p>
         </p:txBody>
       </p:sp>
@@ -4069,7 +4069,7 @@
         </p:nvSpPr>
         <p:spPr>
           <a:xfrm>
-            <a:off x="1280160" y="987552"/>
+            <a:off x="1280160" y="1097280"/>
             <a:ext cx="2011680" cy="41148"/>
           </a:xfrm>
           <a:prstGeom prst="rect">
@@ -4097,8 +4097,8 @@
         </p:blipFill>
         <p:spPr>
           <a:xfrm>
-            <a:off x="1706728" y="1143000"/>
-            <a:ext cx="8778240" cy="5486400"/>
+            <a:off x="1779880" y="1261872"/>
+            <a:ext cx="8631936" cy="5394960"/>
           </a:xfrm>
           <a:prstGeom prst="ellipse">
             <a:avLst/>
@@ -4195,8 +4195,8 @@
         </p:nvSpPr>
         <p:spPr>
           <a:xfrm>
-            <a:off x="1261872" y="329184"/>
-            <a:ext cx="10426903" cy="676656"/>
+            <a:off x="1261872" y="274320"/>
+            <a:ext cx="10426903" cy="804672"/>
           </a:xfrm>
           <a:prstGeom prst="rect">
             <a:avLst/>
@@ -4212,7 +4212,7 @@
               <a:buNone/>
             </a:pPr>
             <a:r>
-              <a:rPr lang="en-US" sz="2100" b="1" dirty="0">
+              <a:rPr lang="en-US" sz="2300" b="1" dirty="0">
                 <a:solidFill>
                   <a:srgbClr val="15242E"/>
                 </a:solidFill>
@@ -4222,7 +4222,7 @@
               </a:rPr>
               <a:t>Twenty-four ready reports — Excel and PDF in one click.</a:t>
             </a:r>
-            <a:endParaRPr lang="en-US" sz="2100" dirty="0"/>
+            <a:endParaRPr lang="en-US" sz="2300" dirty="0"/>
           </a:p>
         </p:txBody>
       </p:sp>
@@ -4234,7 +4234,7 @@
         </p:nvSpPr>
         <p:spPr>
           <a:xfrm>
-            <a:off x="1280160" y="987552"/>
+            <a:off x="1280160" y="1097280"/>
             <a:ext cx="2011680" cy="41148"/>
           </a:xfrm>
           <a:prstGeom prst="rect">
@@ -4262,8 +4262,8 @@
         </p:blipFill>
         <p:spPr>
           <a:xfrm>
-            <a:off x="1706728" y="1143000"/>
-            <a:ext cx="8778240" cy="5486400"/>
+            <a:off x="1779880" y="1261872"/>
+            <a:ext cx="8631936" cy="5394960"/>
           </a:xfrm>
           <a:prstGeom prst="ellipse">
             <a:avLst/>
@@ -4360,8 +4360,8 @@
         </p:nvSpPr>
         <p:spPr>
           <a:xfrm>
-            <a:off x="1261872" y="329184"/>
-            <a:ext cx="10426903" cy="676656"/>
+            <a:off x="1261872" y="274320"/>
+            <a:ext cx="10426903" cy="804672"/>
           </a:xfrm>
           <a:prstGeom prst="rect">
             <a:avLst/>
@@ -4377,7 +4377,7 @@
               <a:buNone/>
             </a:pPr>
             <a:r>
-              <a:rPr lang="en-US" sz="2100" b="1" dirty="0">
+              <a:rPr lang="en-US" sz="2300" b="1" dirty="0">
                 <a:solidFill>
                   <a:srgbClr val="15242E"/>
                 </a:solidFill>
@@ -4387,7 +4387,7 @@
               </a:rPr>
               <a:t>Incidents become case files — reported, assigned, resolved, closed.</a:t>
             </a:r>
-            <a:endParaRPr lang="en-US" sz="2100" dirty="0"/>
+            <a:endParaRPr lang="en-US" sz="2300" dirty="0"/>
           </a:p>
         </p:txBody>
       </p:sp>
@@ -4399,7 +4399,7 @@
         </p:nvSpPr>
         <p:spPr>
           <a:xfrm>
-            <a:off x="1280160" y="987552"/>
+            <a:off x="1280160" y="1097280"/>
             <a:ext cx="2011680" cy="41148"/>
           </a:xfrm>
           <a:prstGeom prst="rect">
@@ -4427,8 +4427,8 @@
         </p:blipFill>
         <p:spPr>
           <a:xfrm>
-            <a:off x="1706728" y="1143000"/>
-            <a:ext cx="8778240" cy="5486400"/>
+            <a:off x="1779880" y="1261872"/>
+            <a:ext cx="8631936" cy="5394960"/>
           </a:xfrm>
           <a:prstGeom prst="ellipse">
             <a:avLst/>
@@ -4525,8 +4525,8 @@
         </p:nvSpPr>
         <p:spPr>
           <a:xfrm>
-            <a:off x="1261872" y="329184"/>
-            <a:ext cx="10426903" cy="676656"/>
+            <a:off x="1261872" y="274320"/>
+            <a:ext cx="10426903" cy="804672"/>
           </a:xfrm>
           <a:prstGeom prst="rect">
             <a:avLst/>
@@ -4542,7 +4542,7 @@
               <a:buNone/>
             </a:pPr>
             <a:r>
-              <a:rPr lang="en-US" sz="2100" b="1" dirty="0">
+              <a:rPr lang="en-US" sz="2300" b="1" dirty="0">
                 <a:solidFill>
                   <a:srgbClr val="15242E"/>
                 </a:solidFill>
@@ -4552,7 +4552,7 @@
               </a:rPr>
               <a:t>Inspections run on your own checklists — your team writes the questions.</a:t>
             </a:r>
-            <a:endParaRPr lang="en-US" sz="2100" dirty="0"/>
+            <a:endParaRPr lang="en-US" sz="2300" dirty="0"/>
           </a:p>
         </p:txBody>
       </p:sp>
@@ -4564,7 +4564,7 @@
         </p:nvSpPr>
         <p:spPr>
           <a:xfrm>
-            <a:off x="1280160" y="987552"/>
+            <a:off x="1280160" y="1097280"/>
             <a:ext cx="2011680" cy="41148"/>
           </a:xfrm>
           <a:prstGeom prst="rect">
@@ -4592,8 +4592,8 @@
         </p:blipFill>
         <p:spPr>
           <a:xfrm>
-            <a:off x="1706728" y="1143000"/>
-            <a:ext cx="8778240" cy="5486400"/>
+            <a:off x="1779880" y="1261872"/>
+            <a:ext cx="8631936" cy="5394960"/>
           </a:xfrm>
           <a:prstGeom prst="ellipse">
             <a:avLst/>
